--- a/examples/GETI-B_ST_profile.pptx
+++ b/examples/GETI-B_ST_profile.pptx
@@ -3470,7 +3470,7 @@
         <p:spPr>
           <a:xfrm>
             <a:off x="6126480" y="914400"/>
-            <a:ext cx="5577840" cy="3295996"/>
+            <a:ext cx="5577840" cy="2535382"/>
           </a:xfrm>
           <a:prstGeom prst="rect">
             <a:avLst/>
